--- a/PayWise_중간발표.pptx
+++ b/PayWise_중간발표.pptx
@@ -9453,7 +9453,7 @@
                 <a:ea typeface="Calibri" pitchFamily="34" charset="-122"/>
                 <a:cs typeface="Calibri" pitchFamily="34" charset="-120"/>
               </a:rPr>
-              <a:t>FastAPI 백엔드 + 전 API 라우트 구현</a:t>
+              <a:t>FastAPI 백엔드 + 16종 API 라우트 구현</a:t>
             </a:r>
             <a:endParaRPr lang="en-US" sz="1050" dirty="0"/>
           </a:p>
@@ -9471,7 +9471,7 @@
                 <a:ea typeface="Calibri" pitchFamily="34" charset="-122"/>
                 <a:cs typeface="Calibri" pitchFamily="34" charset="-120"/>
               </a:rPr>
-              <a:t>K-Means / Isolation Forest / LSTM / XGBoost ML 모델</a:t>
+              <a:t>K-Means / IF / LSTM / XGBoost 4종 ML 모델</a:t>
             </a:r>
             <a:endParaRPr lang="en-US" sz="1050" dirty="0"/>
           </a:p>
@@ -9489,7 +9489,7 @@
                 <a:ea typeface="Calibri" pitchFamily="34" charset="-122"/>
                 <a:cs typeface="Calibri" pitchFamily="34" charset="-120"/>
               </a:rPr>
-              <a:t>fraud-service 추론 API + 규칙 엔진</a:t>
+              <a:t>fraud-service: IF·RF·Hybrid 3종 사기탐지 모델</a:t>
             </a:r>
             <a:endParaRPr lang="en-US" sz="1050" dirty="0"/>
           </a:p>
@@ -9507,7 +9507,7 @@
                 <a:ea typeface="Calibri" pitchFamily="34" charset="-122"/>
                 <a:cs typeface="Calibri" pitchFamily="34" charset="-120"/>
               </a:rPr>
-              <a:t>IF (비지도) + RF (지도) + Hybrid 실험</a:t>
+              <a:t>규칙 엔진 + ML 하이브리드 판단 로직 (BLOCK/REVIEW/PASS)</a:t>
             </a:r>
             <a:endParaRPr lang="en-US" sz="1050" dirty="0"/>
           </a:p>
@@ -9525,7 +9525,7 @@
                 <a:ea typeface="Calibri" pitchFamily="34" charset="-122"/>
                 <a:cs typeface="Calibri" pitchFamily="34" charset="-120"/>
               </a:rPr>
-              <a:t>Next.js 프론트엔드 기본 구조</a:t>
+              <a:t>JWT + 2FA(TOTP·FIDO2) 인증 체계 전환 완료</a:t>
             </a:r>
             <a:endParaRPr lang="en-US" sz="1050" dirty="0"/>
           </a:p>
@@ -9543,7 +9543,7 @@
                 <a:ea typeface="Calibri" pitchFamily="34" charset="-122"/>
                 <a:cs typeface="Calibri" pitchFamily="34" charset="-120"/>
               </a:rPr>
-              <a:t>Docker Compose 설정</a:t>
+              <a:t>블록체인 감사 로그 + ABE/ABAC 접근 제어</a:t>
             </a:r>
             <a:endParaRPr lang="en-US" sz="1050" dirty="0"/>
           </a:p>
@@ -9561,7 +9561,7 @@
                 <a:ea typeface="Calibri" pitchFamily="34" charset="-122"/>
                 <a:cs typeface="Calibri" pitchFamily="34" charset="-120"/>
               </a:rPr>
-              <a:t>XAI Reason Code / FIDO / 감정 분석 API</a:t>
+              <a:t>MyData 동의 관리 · PID 가명처리 구조</a:t>
             </a:r>
             <a:endParaRPr lang="en-US" sz="1050" dirty="0"/>
           </a:p>
@@ -9579,7 +9579,7 @@
                 <a:ea typeface="Calibri" pitchFamily="34" charset="-122"/>
                 <a:cs typeface="Calibri" pitchFamily="34" charset="-120"/>
               </a:rPr>
-              <a:t>Alembic DB 마이그레이션 자동화</a:t>
+              <a:t>Next.js 프론트 + Docker Compose 전체 스택 기동</a:t>
             </a:r>
             <a:endParaRPr lang="en-US" sz="1050" dirty="0"/>
           </a:p>
@@ -9715,7 +9715,7 @@
                 <a:ea typeface="Calibri" pitchFamily="34" charset="-122"/>
                 <a:cs typeface="Calibri" pitchFamily="34" charset="-120"/>
               </a:rPr>
-              <a:t>PostgreSQL 연동 (InMemory → SQLAlchemy)</a:t>
+              <a:t>PostgreSQL 실 연동 + ML 학습 파이프라인 완성</a:t>
             </a:r>
             <a:endParaRPr lang="en-US" sz="1050" dirty="0"/>
           </a:p>
@@ -9733,7 +9733,7 @@
                 <a:ea typeface="Calibri" pitchFamily="34" charset="-122"/>
                 <a:cs typeface="Calibri" pitchFamily="34" charset="-120"/>
               </a:rPr>
-              <a:t>Redis 캐시 TTL 설정</a:t>
+              <a:t>프론트-백엔드 실 API 연동 테스트</a:t>
             </a:r>
             <a:endParaRPr lang="en-US" sz="1050" dirty="0"/>
           </a:p>
@@ -9751,7 +9751,7 @@
                 <a:ea typeface="Calibri" pitchFamily="34" charset="-122"/>
                 <a:cs typeface="Calibri" pitchFamily="34" charset="-120"/>
               </a:rPr>
-              <a:t>LSTM / XGBoost 학습 파이프라인 완성</a:t>
+              <a:t>Federated Learning 시뮬레이션 · 평가 지표 정합성 검증</a:t>
             </a:r>
             <a:endParaRPr lang="en-US" sz="1050" dirty="0"/>
           </a:p>
@@ -9769,7 +9769,7 @@
                 <a:ea typeface="Calibri" pitchFamily="34" charset="-122"/>
                 <a:cs typeface="Calibri" pitchFamily="34" charset="-120"/>
               </a:rPr>
-              <a:t>fraud-service ↔ backend 실제 연동 테스트</a:t>
+              <a:t>감정 × 소비 상관 분석 고도화</a:t>
             </a:r>
             <a:endParaRPr lang="en-US" sz="1050" dirty="0"/>
           </a:p>
@@ -9905,7 +9905,7 @@
                 <a:ea typeface="Calibri" pitchFamily="34" charset="-122"/>
                 <a:cs typeface="Calibri" pitchFamily="34" charset="-120"/>
               </a:rPr>
-              <a:t>JWT 인증 + 알림 기능 (예산 80%)</a:t>
+              <a:t>Vercel + Railway 실서비스 배포 + GitHub Actions CI/CD</a:t>
             </a:r>
             <a:endParaRPr lang="en-US" sz="1050" dirty="0"/>
           </a:p>
@@ -9923,7 +9923,7 @@
                 <a:ea typeface="Calibri" pitchFamily="34" charset="-122"/>
                 <a:cs typeface="Calibri" pitchFamily="34" charset="-120"/>
               </a:rPr>
-              <a:t>Recharts 시계열 라인 차트</a:t>
+              <a:t>자산 통합 분석 확장 (현금흐름 예측 · Peer Benchmark)</a:t>
             </a:r>
             <a:endParaRPr lang="en-US" sz="1050" dirty="0"/>
           </a:p>
@@ -9941,7 +9941,7 @@
                 <a:ea typeface="Calibri" pitchFamily="34" charset="-122"/>
                 <a:cs typeface="Calibri" pitchFamily="34" charset="-120"/>
               </a:rPr>
-              <a:t>CI/CD 파이프라인 구축</a:t>
+              <a:t>MyData 테스트베드 실연동 + Rate Limiting 적용</a:t>
             </a:r>
             <a:endParaRPr lang="en-US" sz="1050" dirty="0"/>
           </a:p>
@@ -9959,7 +9959,7 @@
                 <a:ea typeface="Calibri" pitchFamily="34" charset="-122"/>
                 <a:cs typeface="Calibri" pitchFamily="34" charset="-120"/>
               </a:rPr>
-              <a:t>모바일 반응형 UI 개선</a:t>
+              <a:t>영수증 OCR · LLM 기반 맞춤 소비 코칭</a:t>
             </a:r>
             <a:endParaRPr lang="en-US" sz="1050" dirty="0"/>
           </a:p>
